--- a/atelier/atelier-f11-sample-sale.pptx
+++ b/atelier/atelier-f11-sample-sale.pptx
@@ -3360,7 +3360,7 @@
         </p:nvSpPr>
         <p:spPr>
           <a:xfrm>
-            <a:off x="4762500" y="6382792"/>
+            <a:off x="4762500" y="6302276"/>
             <a:ext cx="762000" cy="19050"/>
           </a:xfrm>
           <a:prstGeom prst="rect">
@@ -3640,7 +3640,7 @@
         </p:nvSpPr>
         <p:spPr>
           <a:xfrm>
-            <a:off x="3900249" y="3380184"/>
+            <a:off x="3900249" y="3518743"/>
             <a:ext cx="2486501" cy="133350"/>
           </a:xfrm>
           <a:prstGeom prst="rect">
@@ -3675,8 +3675,8 @@
         </p:nvSpPr>
         <p:spPr>
           <a:xfrm>
-            <a:off x="1989772" y="3665934"/>
-            <a:ext cx="6307455" cy="1095375"/>
+            <a:off x="1989772" y="3804493"/>
+            <a:ext cx="6307455" cy="876300"/>
           </a:xfrm>
           <a:prstGeom prst="rect">
             <a:avLst/>
@@ -3687,7 +3687,11 @@
           <a:bodyPr wrap="none" anchor="t" lIns="0" rIns="0" tIns="0" bIns="0"/>
           <a:lstStyle/>
           <a:p>
-            <a:pPr algn="ctr"/>
+            <a:pPr algn="ctr">
+              <a:lnSpc>
+                <a:spcPct val="92000"/>
+              </a:lnSpc>
+            </a:pPr>
             <a:r>
               <a:rPr sz="7500" i="1" b="0">
                 <a:solidFill>
@@ -3710,7 +3714,7 @@
         </p:nvSpPr>
         <p:spPr>
           <a:xfrm>
-            <a:off x="2921124" y="4875609"/>
+            <a:off x="2921124" y="4795093"/>
             <a:ext cx="4444603" cy="152400"/>
           </a:xfrm>
           <a:prstGeom prst="rect">
@@ -3745,7 +3749,7 @@
         </p:nvSpPr>
         <p:spPr>
           <a:xfrm>
-            <a:off x="2127260" y="5395764"/>
+            <a:off x="2127260" y="5315248"/>
             <a:ext cx="2991326" cy="619125"/>
           </a:xfrm>
           <a:prstGeom prst="rect">
@@ -3780,7 +3784,7 @@
         </p:nvSpPr>
         <p:spPr>
           <a:xfrm>
-            <a:off x="4476750" y="5491014"/>
+            <a:off x="4476750" y="5410498"/>
             <a:ext cx="990600" cy="428625"/>
           </a:xfrm>
           <a:prstGeom prst="rect">
@@ -3815,7 +3819,7 @@
         </p:nvSpPr>
         <p:spPr>
           <a:xfrm>
-            <a:off x="4722688" y="5389959"/>
+            <a:off x="4722688" y="5309443"/>
             <a:ext cx="3539728" cy="630882"/>
           </a:xfrm>
           <a:prstGeom prst="rect">
@@ -3854,8 +3858,8 @@
         </p:nvSpPr>
         <p:spPr>
           <a:xfrm>
-            <a:off x="3749561" y="6611392"/>
-            <a:ext cx="2787729" cy="285750"/>
+            <a:off x="3749561" y="6530876"/>
+            <a:ext cx="2787729" cy="227707"/>
           </a:xfrm>
           <a:prstGeom prst="rect">
             <a:avLst/>
@@ -3866,7 +3870,11 @@
           <a:bodyPr wrap="none" anchor="t" lIns="0" rIns="0" tIns="0" bIns="0"/>
           <a:lstStyle/>
           <a:p>
-            <a:pPr algn="ctr"/>
+            <a:pPr algn="ctr">
+              <a:lnSpc>
+                <a:spcPct val="92000"/>
+              </a:lnSpc>
+            </a:pPr>
             <a:r>
               <a:rPr sz="1950" i="1" b="0">
                 <a:solidFill>
@@ -3889,7 +3897,7 @@
         </p:nvSpPr>
         <p:spPr>
           <a:xfrm>
-            <a:off x="3245927" y="6973342"/>
+            <a:off x="3245927" y="6834783"/>
             <a:ext cx="3794998" cy="142875"/>
           </a:xfrm>
           <a:prstGeom prst="rect">
